--- a/docs/camp_briefing/camp_briefing.pptx
+++ b/docs/camp_briefing/camp_briefing.pptx
@@ -10541,391 +10541,1061 @@
           </a:p>
         </p:txBody>
       </p:sp>
-      <p:graphicFrame>
-        <p:nvGraphicFramePr>
-          <p:cNvPr id="6" name="Table 5"/>
-          <p:cNvGraphicFramePr>
-            <a:graphicFrameLocks noGrp="1"/>
-          </p:cNvGraphicFramePr>
+      <p:sp>
+        <p:nvSpPr>
+          <p:cNvPr id="6" name="Rounded Rectangle 5"/>
+          <p:cNvSpPr/>
           <p:nvPr/>
-        </p:nvGraphicFramePr>
-        <p:xfrm>
-          <a:off x="548640" y="1417320"/>
-          <a:ext cx="11064240" cy="2834640"/>
-        </p:xfrm>
-        <a:graphic>
-          <a:graphicData uri="http://schemas.openxmlformats.org/drawingml/2006/table">
-            <a:tbl>
-              <a:tblPr firstRow="1" bandRow="1">
-                <a:tableStyleId>{5C22544A-7EE6-4342-B048-85BDC9FD1C3A}</a:tableStyleId>
-              </a:tblPr>
-              <a:tblGrid>
-                <a:gridCol w="2194560"/>
-                <a:gridCol w="3291840"/>
-                <a:gridCol w="5577840"/>
-              </a:tblGrid>
-              <a:tr h="566928">
-                <a:tc>
-                  <a:txBody>
-                    <a:bodyPr wrap="square"/>
-                    <a:lstStyle/>
-                    <a:p>
-                      <a:pPr algn="l"/>
-                      <a:r>
-                        <a:rPr sz="1600" b="1">
-                          <a:solidFill>
-                            <a:srgbClr val="FFFFFF"/>
-                          </a:solidFill>
-                          <a:latin typeface="Noto Sans JP"/>
-                        </a:rPr>
-                        <a:t>メンバー</a:t>
-                      </a:r>
-                    </a:p>
-                  </a:txBody>
-                  <a:tcPr anchor="ctr">
-                    <a:solidFill>
-                      <a:srgbClr val="14213D"/>
-                    </a:solidFill>
-                  </a:tcPr>
-                </a:tc>
-                <a:tc>
-                  <a:txBody>
-                    <a:bodyPr wrap="square"/>
-                    <a:lstStyle/>
-                    <a:p>
-                      <a:pPr algn="l"/>
-                      <a:r>
-                        <a:rPr sz="1600" b="1">
-                          <a:solidFill>
-                            <a:srgbClr val="FFFFFF"/>
-                          </a:solidFill>
-                          <a:latin typeface="Noto Sans JP"/>
-                        </a:rPr>
-                        <a:t>担当</a:t>
-                      </a:r>
-                    </a:p>
-                  </a:txBody>
-                  <a:tcPr anchor="ctr">
-                    <a:solidFill>
-                      <a:srgbClr val="14213D"/>
-                    </a:solidFill>
-                  </a:tcPr>
-                </a:tc>
-                <a:tc>
-                  <a:txBody>
-                    <a:bodyPr wrap="square"/>
-                    <a:lstStyle/>
-                    <a:p>
-                      <a:pPr algn="l"/>
-                      <a:r>
-                        <a:rPr sz="1600" b="1">
-                          <a:solidFill>
-                            <a:srgbClr val="FFFFFF"/>
-                          </a:solidFill>
-                          <a:latin typeface="Noto Sans JP"/>
-                        </a:rPr>
-                        <a:t>見ているところ</a:t>
-                      </a:r>
-                    </a:p>
-                  </a:txBody>
-                  <a:tcPr anchor="ctr">
-                    <a:solidFill>
-                      <a:srgbClr val="14213D"/>
-                    </a:solidFill>
-                  </a:tcPr>
-                </a:tc>
-              </a:tr>
-              <a:tr h="566928">
-                <a:tc>
-                  <a:txBody>
-                    <a:bodyPr wrap="square"/>
-                    <a:lstStyle/>
-                    <a:p>
-                      <a:pPr algn="l"/>
-                      <a:r>
-                        <a:rPr sz="1600" b="1">
-                          <a:solidFill>
-                            <a:srgbClr val="1F2937"/>
-                          </a:solidFill>
-                          <a:latin typeface="Noto Sans JP"/>
-                        </a:rPr>
-                        <a:t>⚡ 颯（はやて）</a:t>
-                      </a:r>
-                    </a:p>
-                  </a:txBody>
-                  <a:tcPr anchor="ctr">
-                    <a:solidFill>
-                      <a:srgbClr val="FFFFFF"/>
-                    </a:solidFill>
-                  </a:tcPr>
-                </a:tc>
-                <a:tc>
-                  <a:txBody>
-                    <a:bodyPr wrap="square"/>
-                    <a:lstStyle/>
-                    <a:p>
-                      <a:pPr algn="l"/>
-                      <a:r>
-                        <a:rPr sz="1600" b="0">
-                          <a:solidFill>
-                            <a:srgbClr val="1F2937"/>
-                          </a:solidFill>
-                          <a:latin typeface="Noto Sans JP"/>
-                        </a:rPr>
-                        <a:t>短期トレード</a:t>
-                      </a:r>
-                    </a:p>
-                  </a:txBody>
-                  <a:tcPr anchor="ctr">
-                    <a:solidFill>
-                      <a:srgbClr val="FFFFFF"/>
-                    </a:solidFill>
-                  </a:tcPr>
-                </a:tc>
-                <a:tc>
-                  <a:txBody>
-                    <a:bodyPr wrap="square"/>
-                    <a:lstStyle/>
-                    <a:p>
-                      <a:pPr algn="l"/>
-                      <a:r>
-                        <a:rPr sz="1600" b="0">
-                          <a:solidFill>
-                            <a:srgbClr val="1F2937"/>
-                          </a:solidFill>
-                          <a:latin typeface="Noto Sans JP"/>
-                        </a:rPr>
-                        <a:t>値動きの大きさ・急な変動への備え</a:t>
-                      </a:r>
-                    </a:p>
-                  </a:txBody>
-                  <a:tcPr anchor="ctr">
-                    <a:solidFill>
-                      <a:srgbClr val="FFFFFF"/>
-                    </a:solidFill>
-                  </a:tcPr>
-                </a:tc>
-              </a:tr>
-              <a:tr h="566928">
-                <a:tc>
-                  <a:txBody>
-                    <a:bodyPr wrap="square"/>
-                    <a:lstStyle/>
-                    <a:p>
-                      <a:pPr algn="l"/>
-                      <a:r>
-                        <a:rPr sz="1600" b="1">
-                          <a:solidFill>
-                            <a:srgbClr val="1F2937"/>
-                          </a:solidFill>
-                          <a:latin typeface="Noto Sans JP"/>
-                        </a:rPr>
-                        <a:t>📈 環（たまき）</a:t>
-                      </a:r>
-                    </a:p>
-                  </a:txBody>
-                  <a:tcPr anchor="ctr">
-                    <a:solidFill>
-                      <a:srgbClr val="F3F4F6"/>
-                    </a:solidFill>
-                  </a:tcPr>
-                </a:tc>
-                <a:tc>
-                  <a:txBody>
-                    <a:bodyPr wrap="square"/>
-                    <a:lstStyle/>
-                    <a:p>
-                      <a:pPr algn="l"/>
-                      <a:r>
-                        <a:rPr sz="1600" b="0">
-                          <a:solidFill>
-                            <a:srgbClr val="1F2937"/>
-                          </a:solidFill>
-                          <a:latin typeface="Noto Sans JP"/>
-                        </a:rPr>
-                        <a:t>割安度の分析</a:t>
-                      </a:r>
-                    </a:p>
-                  </a:txBody>
-                  <a:tcPr anchor="ctr">
-                    <a:solidFill>
-                      <a:srgbClr val="F3F4F6"/>
-                    </a:solidFill>
-                  </a:tcPr>
-                </a:tc>
-                <a:tc>
-                  <a:txBody>
-                    <a:bodyPr wrap="square"/>
-                    <a:lstStyle/>
-                    <a:p>
-                      <a:pPr algn="l"/>
-                      <a:r>
-                        <a:rPr sz="1600" b="0">
-                          <a:solidFill>
-                            <a:srgbClr val="1F2937"/>
-                          </a:solidFill>
-                          <a:latin typeface="Noto Sans JP"/>
-                        </a:rPr>
-                        <a:t>割安さと、利益が伸びているか</a:t>
-                      </a:r>
-                    </a:p>
-                  </a:txBody>
-                  <a:tcPr anchor="ctr">
-                    <a:solidFill>
-                      <a:srgbClr val="F3F4F6"/>
-                    </a:solidFill>
-                  </a:tcPr>
-                </a:tc>
-              </a:tr>
-              <a:tr h="566928">
-                <a:tc>
-                  <a:txBody>
-                    <a:bodyPr wrap="square"/>
-                    <a:lstStyle/>
-                    <a:p>
-                      <a:pPr algn="l"/>
-                      <a:r>
-                        <a:rPr sz="1600" b="1">
-                          <a:solidFill>
-                            <a:srgbClr val="1F2937"/>
-                          </a:solidFill>
-                          <a:latin typeface="Noto Sans JP"/>
-                        </a:rPr>
-                        <a:t>🔎 凪（なぎ）</a:t>
-                      </a:r>
-                    </a:p>
-                  </a:txBody>
-                  <a:tcPr anchor="ctr">
-                    <a:solidFill>
-                      <a:srgbClr val="FFFFFF"/>
-                    </a:solidFill>
-                  </a:tcPr>
-                </a:tc>
-                <a:tc>
-                  <a:txBody>
-                    <a:bodyPr wrap="square"/>
-                    <a:lstStyle/>
-                    <a:p>
-                      <a:pPr algn="l"/>
-                      <a:r>
-                        <a:rPr sz="1600" b="0">
-                          <a:solidFill>
-                            <a:srgbClr val="1F2937"/>
-                          </a:solidFill>
-                          <a:latin typeface="Noto Sans JP"/>
-                        </a:rPr>
-                        <a:t>企業リサーチ</a:t>
-                      </a:r>
-                    </a:p>
-                  </a:txBody>
-                  <a:tcPr anchor="ctr">
-                    <a:solidFill>
-                      <a:srgbClr val="FFFFFF"/>
-                    </a:solidFill>
-                  </a:tcPr>
-                </a:tc>
-                <a:tc>
-                  <a:txBody>
-                    <a:bodyPr wrap="square"/>
-                    <a:lstStyle/>
-                    <a:p>
-                      <a:pPr algn="l"/>
-                      <a:r>
-                        <a:rPr sz="1600" b="0">
-                          <a:solidFill>
-                            <a:srgbClr val="1F2937"/>
-                          </a:solidFill>
-                          <a:latin typeface="Noto Sans JP"/>
-                        </a:rPr>
-                        <a:t>どんな会社か・売上や利益の推移</a:t>
-                      </a:r>
-                    </a:p>
-                  </a:txBody>
-                  <a:tcPr anchor="ctr">
-                    <a:solidFill>
-                      <a:srgbClr val="FFFFFF"/>
-                    </a:solidFill>
-                  </a:tcPr>
-                </a:tc>
-              </a:tr>
-              <a:tr h="566928">
-                <a:tc>
-                  <a:txBody>
-                    <a:bodyPr wrap="square"/>
-                    <a:lstStyle/>
-                    <a:p>
-                      <a:pPr algn="l"/>
-                      <a:r>
-                        <a:rPr sz="1600" b="1">
-                          <a:solidFill>
-                            <a:srgbClr val="1F2937"/>
-                          </a:solidFill>
-                          <a:latin typeface="Noto Sans JP"/>
-                        </a:rPr>
-                        <a:t>🛡 朔（さく）</a:t>
-                      </a:r>
-                    </a:p>
-                  </a:txBody>
-                  <a:tcPr anchor="ctr">
-                    <a:solidFill>
-                      <a:srgbClr val="F3F4F6"/>
-                    </a:solidFill>
-                  </a:tcPr>
-                </a:tc>
-                <a:tc>
-                  <a:txBody>
-                    <a:bodyPr wrap="square"/>
-                    <a:lstStyle/>
-                    <a:p>
-                      <a:pPr algn="l"/>
-                      <a:r>
-                        <a:rPr sz="1600" b="0">
-                          <a:solidFill>
-                            <a:srgbClr val="1F2937"/>
-                          </a:solidFill>
-                          <a:latin typeface="Noto Sans JP"/>
-                        </a:rPr>
-                        <a:t>まとめ・チェック</a:t>
-                      </a:r>
-                    </a:p>
-                  </a:txBody>
-                  <a:tcPr anchor="ctr">
-                    <a:solidFill>
-                      <a:srgbClr val="F3F4F6"/>
-                    </a:solidFill>
-                  </a:tcPr>
-                </a:tc>
-                <a:tc>
-                  <a:txBody>
-                    <a:bodyPr wrap="square"/>
-                    <a:lstStyle/>
-                    <a:p>
-                      <a:pPr algn="l"/>
-                      <a:r>
-                        <a:rPr sz="1600" b="0">
-                          <a:solidFill>
-                            <a:srgbClr val="1F2937"/>
-                          </a:solidFill>
-                          <a:latin typeface="Noto Sans JP"/>
-                        </a:rPr>
-                        <a:t>全体のまとめと注意点（最後に投稿）</a:t>
-                      </a:r>
-                    </a:p>
-                  </a:txBody>
-                  <a:tcPr anchor="ctr">
-                    <a:solidFill>
-                      <a:srgbClr val="F3F4F6"/>
-                    </a:solidFill>
-                  </a:tcPr>
-                </a:tc>
-              </a:tr>
-            </a:tbl>
-          </a:graphicData>
-        </a:graphic>
-      </p:graphicFrame>
-      <p:sp>
-        <p:nvSpPr>
-          <p:cNvPr id="7" name="TextBox 6"/>
+        </p:nvSpPr>
+        <p:spPr>
+          <a:xfrm>
+            <a:off x="548640" y="1371600"/>
+            <a:ext cx="2615184" cy="4434840"/>
+          </a:xfrm>
+          <a:prstGeom prst="roundRect">
+            <a:avLst>
+              <a:gd name="adj" fmla="val 5000"/>
+            </a:avLst>
+          </a:prstGeom>
+          <a:solidFill>
+            <a:srgbClr val="F3F4F6"/>
+          </a:solidFill>
+          <a:ln>
+            <a:noFill/>
+          </a:ln>
+          <a:effectLst/>
+        </p:spPr>
+        <p:style>
+          <a:lnRef idx="1">
+            <a:schemeClr val="accent1"/>
+          </a:lnRef>
+          <a:fillRef idx="3">
+            <a:schemeClr val="accent1"/>
+          </a:fillRef>
+          <a:effectRef idx="2">
+            <a:schemeClr val="accent1"/>
+          </a:effectRef>
+          <a:fontRef idx="minor">
+            <a:schemeClr val="lt1"/>
+          </a:fontRef>
+        </p:style>
+        <p:txBody>
+          <a:bodyPr rtlCol="0" anchor="ctr"/>
+          <a:lstStyle/>
+          <a:p>
+            <a:pPr algn="ctr"/>
+          </a:p>
+        </p:txBody>
+      </p:sp>
+      <p:sp>
+        <p:nvSpPr>
+          <p:cNvPr id="7" name="Rectangle 6"/>
+          <p:cNvSpPr/>
+          <p:nvPr/>
+        </p:nvSpPr>
+        <p:spPr>
+          <a:xfrm>
+            <a:off x="548640" y="1371600"/>
+            <a:ext cx="2615184" cy="91440"/>
+          </a:xfrm>
+          <a:prstGeom prst="rect">
+            <a:avLst/>
+          </a:prstGeom>
+          <a:solidFill>
+            <a:srgbClr val="DC2626"/>
+          </a:solidFill>
+          <a:ln>
+            <a:noFill/>
+          </a:ln>
+          <a:effectLst/>
+        </p:spPr>
+        <p:style>
+          <a:lnRef idx="1">
+            <a:schemeClr val="accent1"/>
+          </a:lnRef>
+          <a:fillRef idx="3">
+            <a:schemeClr val="accent1"/>
+          </a:fillRef>
+          <a:effectRef idx="2">
+            <a:schemeClr val="accent1"/>
+          </a:effectRef>
+          <a:fontRef idx="minor">
+            <a:schemeClr val="lt1"/>
+          </a:fontRef>
+        </p:style>
+        <p:txBody>
+          <a:bodyPr rtlCol="0" anchor="ctr"/>
+          <a:lstStyle/>
+          <a:p>
+            <a:pPr algn="ctr"/>
+          </a:p>
+        </p:txBody>
+      </p:sp>
+      <p:sp>
+        <p:nvSpPr>
+          <p:cNvPr id="8" name="Rounded Rectangle 7"/>
+          <p:cNvSpPr/>
+          <p:nvPr/>
+        </p:nvSpPr>
+        <p:spPr>
+          <a:xfrm>
+            <a:off x="941832" y="1645920"/>
+            <a:ext cx="1828800" cy="1828800"/>
+          </a:xfrm>
+          <a:prstGeom prst="roundRect">
+            <a:avLst/>
+          </a:prstGeom>
+          <a:solidFill>
+            <a:srgbClr val="FFFFFF"/>
+          </a:solidFill>
+          <a:ln>
+            <a:solidFill>
+              <a:srgbClr val="DC2626"/>
+            </a:solidFill>
+            <a:prstDash val="dash"/>
+          </a:ln>
+          <a:effectLst/>
+        </p:spPr>
+        <p:style>
+          <a:lnRef idx="1">
+            <a:schemeClr val="accent1"/>
+          </a:lnRef>
+          <a:fillRef idx="3">
+            <a:schemeClr val="accent1"/>
+          </a:fillRef>
+          <a:effectRef idx="2">
+            <a:schemeClr val="accent1"/>
+          </a:effectRef>
+          <a:fontRef idx="minor">
+            <a:schemeClr val="lt1"/>
+          </a:fontRef>
+        </p:style>
+        <p:txBody>
+          <a:bodyPr rtlCol="0" anchor="ctr" wrap="square"/>
+          <a:lstStyle/>
+          <a:p>
+            <a:pPr algn="ctr"/>
+            <a:r>
+              <a:rPr sz="1500" b="1">
+                <a:solidFill>
+                  <a:srgbClr val="DC2626"/>
+                </a:solidFill>
+                <a:latin typeface="Noto Sans JP"/>
+              </a:rPr>
+              <a:t>颯の画像</a:t>
+            </a:r>
+          </a:p>
+          <a:p>
+            <a:pPr algn="ctr"/>
+            <a:r>
+              <a:rPr sz="1100" b="0">
+                <a:solidFill>
+                  <a:srgbClr val="6B7280"/>
+                </a:solidFill>
+                <a:latin typeface="Noto Sans JP"/>
+              </a:rPr>
+              <a:t>ここに貼り付け</a:t>
+            </a:r>
+          </a:p>
+        </p:txBody>
+      </p:sp>
+      <p:sp>
+        <p:nvSpPr>
+          <p:cNvPr id="9" name="TextBox 8"/>
+          <p:cNvSpPr txBox="1"/>
+          <p:nvPr/>
+        </p:nvSpPr>
+        <p:spPr>
+          <a:xfrm>
+            <a:off x="685800" y="3611880"/>
+            <a:ext cx="2340864" cy="457200"/>
+          </a:xfrm>
+          <a:prstGeom prst="rect">
+            <a:avLst/>
+          </a:prstGeom>
+          <a:noFill/>
+        </p:spPr>
+        <p:txBody>
+          <a:bodyPr wrap="square" anchor="t" lIns="45720" rIns="45720">
+            <a:spAutoFit/>
+          </a:bodyPr>
+          <a:lstStyle/>
+          <a:p>
+            <a:pPr algn="ctr"/>
+            <a:r>
+              <a:rPr sz="1800" b="1">
+                <a:solidFill>
+                  <a:srgbClr val="14213D"/>
+                </a:solidFill>
+                <a:latin typeface="Noto Sans JP"/>
+              </a:rPr>
+              <a:t>⚡ 颯（はやて）</a:t>
+            </a:r>
+          </a:p>
+        </p:txBody>
+      </p:sp>
+      <p:sp>
+        <p:nvSpPr>
+          <p:cNvPr id="10" name="TextBox 9"/>
+          <p:cNvSpPr txBox="1"/>
+          <p:nvPr/>
+        </p:nvSpPr>
+        <p:spPr>
+          <a:xfrm>
+            <a:off x="685800" y="4069080"/>
+            <a:ext cx="2340864" cy="411480"/>
+          </a:xfrm>
+          <a:prstGeom prst="rect">
+            <a:avLst/>
+          </a:prstGeom>
+          <a:noFill/>
+        </p:spPr>
+        <p:txBody>
+          <a:bodyPr wrap="square" anchor="t" lIns="45720" rIns="45720">
+            <a:spAutoFit/>
+          </a:bodyPr>
+          <a:lstStyle/>
+          <a:p>
+            <a:pPr algn="ctr"/>
+            <a:r>
+              <a:rPr sz="1400" b="1">
+                <a:solidFill>
+                  <a:srgbClr val="DC2626"/>
+                </a:solidFill>
+                <a:latin typeface="Noto Sans JP"/>
+              </a:rPr>
+              <a:t>短期トレード担当</a:t>
+            </a:r>
+          </a:p>
+        </p:txBody>
+      </p:sp>
+      <p:sp>
+        <p:nvSpPr>
+          <p:cNvPr id="11" name="TextBox 10"/>
+          <p:cNvSpPr txBox="1"/>
+          <p:nvPr/>
+        </p:nvSpPr>
+        <p:spPr>
+          <a:xfrm>
+            <a:off x="685800" y="4526280"/>
+            <a:ext cx="2340864" cy="1097280"/>
+          </a:xfrm>
+          <a:prstGeom prst="rect">
+            <a:avLst/>
+          </a:prstGeom>
+          <a:noFill/>
+        </p:spPr>
+        <p:txBody>
+          <a:bodyPr wrap="square" anchor="t" lIns="45720" rIns="45720">
+            <a:spAutoFit/>
+          </a:bodyPr>
+          <a:lstStyle/>
+          <a:p>
+            <a:pPr algn="ctr"/>
+            <a:r>
+              <a:rPr sz="1400" b="0">
+                <a:solidFill>
+                  <a:srgbClr val="1F2937"/>
+                </a:solidFill>
+                <a:latin typeface="Noto Sans JP"/>
+              </a:rPr>
+              <a:t>値動きの大きさ・急な変動への備え</a:t>
+            </a:r>
+          </a:p>
+        </p:txBody>
+      </p:sp>
+      <p:sp>
+        <p:nvSpPr>
+          <p:cNvPr id="12" name="Rounded Rectangle 11"/>
+          <p:cNvSpPr/>
+          <p:nvPr/>
+        </p:nvSpPr>
+        <p:spPr>
+          <a:xfrm>
+            <a:off x="3364992" y="1371600"/>
+            <a:ext cx="2615184" cy="4434840"/>
+          </a:xfrm>
+          <a:prstGeom prst="roundRect">
+            <a:avLst>
+              <a:gd name="adj" fmla="val 5000"/>
+            </a:avLst>
+          </a:prstGeom>
+          <a:solidFill>
+            <a:srgbClr val="F3F4F6"/>
+          </a:solidFill>
+          <a:ln>
+            <a:noFill/>
+          </a:ln>
+          <a:effectLst/>
+        </p:spPr>
+        <p:style>
+          <a:lnRef idx="1">
+            <a:schemeClr val="accent1"/>
+          </a:lnRef>
+          <a:fillRef idx="3">
+            <a:schemeClr val="accent1"/>
+          </a:fillRef>
+          <a:effectRef idx="2">
+            <a:schemeClr val="accent1"/>
+          </a:effectRef>
+          <a:fontRef idx="minor">
+            <a:schemeClr val="lt1"/>
+          </a:fontRef>
+        </p:style>
+        <p:txBody>
+          <a:bodyPr rtlCol="0" anchor="ctr"/>
+          <a:lstStyle/>
+          <a:p>
+            <a:pPr algn="ctr"/>
+          </a:p>
+        </p:txBody>
+      </p:sp>
+      <p:sp>
+        <p:nvSpPr>
+          <p:cNvPr id="13" name="Rectangle 12"/>
+          <p:cNvSpPr/>
+          <p:nvPr/>
+        </p:nvSpPr>
+        <p:spPr>
+          <a:xfrm>
+            <a:off x="3364992" y="1371600"/>
+            <a:ext cx="2615184" cy="91440"/>
+          </a:xfrm>
+          <a:prstGeom prst="rect">
+            <a:avLst/>
+          </a:prstGeom>
+          <a:solidFill>
+            <a:srgbClr val="2563EB"/>
+          </a:solidFill>
+          <a:ln>
+            <a:noFill/>
+          </a:ln>
+          <a:effectLst/>
+        </p:spPr>
+        <p:style>
+          <a:lnRef idx="1">
+            <a:schemeClr val="accent1"/>
+          </a:lnRef>
+          <a:fillRef idx="3">
+            <a:schemeClr val="accent1"/>
+          </a:fillRef>
+          <a:effectRef idx="2">
+            <a:schemeClr val="accent1"/>
+          </a:effectRef>
+          <a:fontRef idx="minor">
+            <a:schemeClr val="lt1"/>
+          </a:fontRef>
+        </p:style>
+        <p:txBody>
+          <a:bodyPr rtlCol="0" anchor="ctr"/>
+          <a:lstStyle/>
+          <a:p>
+            <a:pPr algn="ctr"/>
+          </a:p>
+        </p:txBody>
+      </p:sp>
+      <p:sp>
+        <p:nvSpPr>
+          <p:cNvPr id="14" name="Rounded Rectangle 13"/>
+          <p:cNvSpPr/>
+          <p:nvPr/>
+        </p:nvSpPr>
+        <p:spPr>
+          <a:xfrm>
+            <a:off x="3758184" y="1645920"/>
+            <a:ext cx="1828800" cy="1828800"/>
+          </a:xfrm>
+          <a:prstGeom prst="roundRect">
+            <a:avLst/>
+          </a:prstGeom>
+          <a:solidFill>
+            <a:srgbClr val="FFFFFF"/>
+          </a:solidFill>
+          <a:ln>
+            <a:solidFill>
+              <a:srgbClr val="2563EB"/>
+            </a:solidFill>
+            <a:prstDash val="dash"/>
+          </a:ln>
+          <a:effectLst/>
+        </p:spPr>
+        <p:style>
+          <a:lnRef idx="1">
+            <a:schemeClr val="accent1"/>
+          </a:lnRef>
+          <a:fillRef idx="3">
+            <a:schemeClr val="accent1"/>
+          </a:fillRef>
+          <a:effectRef idx="2">
+            <a:schemeClr val="accent1"/>
+          </a:effectRef>
+          <a:fontRef idx="minor">
+            <a:schemeClr val="lt1"/>
+          </a:fontRef>
+        </p:style>
+        <p:txBody>
+          <a:bodyPr rtlCol="0" anchor="ctr" wrap="square"/>
+          <a:lstStyle/>
+          <a:p>
+            <a:pPr algn="ctr"/>
+            <a:r>
+              <a:rPr sz="1500" b="1">
+                <a:solidFill>
+                  <a:srgbClr val="2563EB"/>
+                </a:solidFill>
+                <a:latin typeface="Noto Sans JP"/>
+              </a:rPr>
+              <a:t>環の画像</a:t>
+            </a:r>
+          </a:p>
+          <a:p>
+            <a:pPr algn="ctr"/>
+            <a:r>
+              <a:rPr sz="1100" b="0">
+                <a:solidFill>
+                  <a:srgbClr val="6B7280"/>
+                </a:solidFill>
+                <a:latin typeface="Noto Sans JP"/>
+              </a:rPr>
+              <a:t>ここに貼り付け</a:t>
+            </a:r>
+          </a:p>
+        </p:txBody>
+      </p:sp>
+      <p:sp>
+        <p:nvSpPr>
+          <p:cNvPr id="15" name="TextBox 14"/>
+          <p:cNvSpPr txBox="1"/>
+          <p:nvPr/>
+        </p:nvSpPr>
+        <p:spPr>
+          <a:xfrm>
+            <a:off x="3502152" y="3611880"/>
+            <a:ext cx="2340864" cy="457200"/>
+          </a:xfrm>
+          <a:prstGeom prst="rect">
+            <a:avLst/>
+          </a:prstGeom>
+          <a:noFill/>
+        </p:spPr>
+        <p:txBody>
+          <a:bodyPr wrap="square" anchor="t" lIns="45720" rIns="45720">
+            <a:spAutoFit/>
+          </a:bodyPr>
+          <a:lstStyle/>
+          <a:p>
+            <a:pPr algn="ctr"/>
+            <a:r>
+              <a:rPr sz="1800" b="1">
+                <a:solidFill>
+                  <a:srgbClr val="14213D"/>
+                </a:solidFill>
+                <a:latin typeface="Noto Sans JP"/>
+              </a:rPr>
+              <a:t>📈 環（たまき）</a:t>
+            </a:r>
+          </a:p>
+        </p:txBody>
+      </p:sp>
+      <p:sp>
+        <p:nvSpPr>
+          <p:cNvPr id="16" name="TextBox 15"/>
+          <p:cNvSpPr txBox="1"/>
+          <p:nvPr/>
+        </p:nvSpPr>
+        <p:spPr>
+          <a:xfrm>
+            <a:off x="3502152" y="4069080"/>
+            <a:ext cx="2340864" cy="411480"/>
+          </a:xfrm>
+          <a:prstGeom prst="rect">
+            <a:avLst/>
+          </a:prstGeom>
+          <a:noFill/>
+        </p:spPr>
+        <p:txBody>
+          <a:bodyPr wrap="square" anchor="t" lIns="45720" rIns="45720">
+            <a:spAutoFit/>
+          </a:bodyPr>
+          <a:lstStyle/>
+          <a:p>
+            <a:pPr algn="ctr"/>
+            <a:r>
+              <a:rPr sz="1400" b="1">
+                <a:solidFill>
+                  <a:srgbClr val="2563EB"/>
+                </a:solidFill>
+                <a:latin typeface="Noto Sans JP"/>
+              </a:rPr>
+              <a:t>割安度の分析担当</a:t>
+            </a:r>
+          </a:p>
+        </p:txBody>
+      </p:sp>
+      <p:sp>
+        <p:nvSpPr>
+          <p:cNvPr id="17" name="TextBox 16"/>
+          <p:cNvSpPr txBox="1"/>
+          <p:nvPr/>
+        </p:nvSpPr>
+        <p:spPr>
+          <a:xfrm>
+            <a:off x="3502152" y="4526280"/>
+            <a:ext cx="2340864" cy="1097280"/>
+          </a:xfrm>
+          <a:prstGeom prst="rect">
+            <a:avLst/>
+          </a:prstGeom>
+          <a:noFill/>
+        </p:spPr>
+        <p:txBody>
+          <a:bodyPr wrap="square" anchor="t" lIns="45720" rIns="45720">
+            <a:spAutoFit/>
+          </a:bodyPr>
+          <a:lstStyle/>
+          <a:p>
+            <a:pPr algn="ctr"/>
+            <a:r>
+              <a:rPr sz="1400" b="0">
+                <a:solidFill>
+                  <a:srgbClr val="1F2937"/>
+                </a:solidFill>
+                <a:latin typeface="Noto Sans JP"/>
+              </a:rPr>
+              <a:t>割安さと、利益が伸びているか</a:t>
+            </a:r>
+          </a:p>
+        </p:txBody>
+      </p:sp>
+      <p:sp>
+        <p:nvSpPr>
+          <p:cNvPr id="18" name="Rounded Rectangle 17"/>
+          <p:cNvSpPr/>
+          <p:nvPr/>
+        </p:nvSpPr>
+        <p:spPr>
+          <a:xfrm>
+            <a:off x="6181344" y="1371600"/>
+            <a:ext cx="2615184" cy="4434840"/>
+          </a:xfrm>
+          <a:prstGeom prst="roundRect">
+            <a:avLst>
+              <a:gd name="adj" fmla="val 5000"/>
+            </a:avLst>
+          </a:prstGeom>
+          <a:solidFill>
+            <a:srgbClr val="F3F4F6"/>
+          </a:solidFill>
+          <a:ln>
+            <a:noFill/>
+          </a:ln>
+          <a:effectLst/>
+        </p:spPr>
+        <p:style>
+          <a:lnRef idx="1">
+            <a:schemeClr val="accent1"/>
+          </a:lnRef>
+          <a:fillRef idx="3">
+            <a:schemeClr val="accent1"/>
+          </a:fillRef>
+          <a:effectRef idx="2">
+            <a:schemeClr val="accent1"/>
+          </a:effectRef>
+          <a:fontRef idx="minor">
+            <a:schemeClr val="lt1"/>
+          </a:fontRef>
+        </p:style>
+        <p:txBody>
+          <a:bodyPr rtlCol="0" anchor="ctr"/>
+          <a:lstStyle/>
+          <a:p>
+            <a:pPr algn="ctr"/>
+          </a:p>
+        </p:txBody>
+      </p:sp>
+      <p:sp>
+        <p:nvSpPr>
+          <p:cNvPr id="19" name="Rectangle 18"/>
+          <p:cNvSpPr/>
+          <p:nvPr/>
+        </p:nvSpPr>
+        <p:spPr>
+          <a:xfrm>
+            <a:off x="6181344" y="1371600"/>
+            <a:ext cx="2615184" cy="91440"/>
+          </a:xfrm>
+          <a:prstGeom prst="rect">
+            <a:avLst/>
+          </a:prstGeom>
+          <a:solidFill>
+            <a:srgbClr val="14213D"/>
+          </a:solidFill>
+          <a:ln>
+            <a:noFill/>
+          </a:ln>
+          <a:effectLst/>
+        </p:spPr>
+        <p:style>
+          <a:lnRef idx="1">
+            <a:schemeClr val="accent1"/>
+          </a:lnRef>
+          <a:fillRef idx="3">
+            <a:schemeClr val="accent1"/>
+          </a:fillRef>
+          <a:effectRef idx="2">
+            <a:schemeClr val="accent1"/>
+          </a:effectRef>
+          <a:fontRef idx="minor">
+            <a:schemeClr val="lt1"/>
+          </a:fontRef>
+        </p:style>
+        <p:txBody>
+          <a:bodyPr rtlCol="0" anchor="ctr"/>
+          <a:lstStyle/>
+          <a:p>
+            <a:pPr algn="ctr"/>
+          </a:p>
+        </p:txBody>
+      </p:sp>
+      <p:sp>
+        <p:nvSpPr>
+          <p:cNvPr id="20" name="Rounded Rectangle 19"/>
+          <p:cNvSpPr/>
+          <p:nvPr/>
+        </p:nvSpPr>
+        <p:spPr>
+          <a:xfrm>
+            <a:off x="6574536" y="1645920"/>
+            <a:ext cx="1828800" cy="1828800"/>
+          </a:xfrm>
+          <a:prstGeom prst="roundRect">
+            <a:avLst/>
+          </a:prstGeom>
+          <a:solidFill>
+            <a:srgbClr val="FFFFFF"/>
+          </a:solidFill>
+          <a:ln>
+            <a:solidFill>
+              <a:srgbClr val="14213D"/>
+            </a:solidFill>
+            <a:prstDash val="dash"/>
+          </a:ln>
+          <a:effectLst/>
+        </p:spPr>
+        <p:style>
+          <a:lnRef idx="1">
+            <a:schemeClr val="accent1"/>
+          </a:lnRef>
+          <a:fillRef idx="3">
+            <a:schemeClr val="accent1"/>
+          </a:fillRef>
+          <a:effectRef idx="2">
+            <a:schemeClr val="accent1"/>
+          </a:effectRef>
+          <a:fontRef idx="minor">
+            <a:schemeClr val="lt1"/>
+          </a:fontRef>
+        </p:style>
+        <p:txBody>
+          <a:bodyPr rtlCol="0" anchor="ctr" wrap="square"/>
+          <a:lstStyle/>
+          <a:p>
+            <a:pPr algn="ctr"/>
+            <a:r>
+              <a:rPr sz="1500" b="1">
+                <a:solidFill>
+                  <a:srgbClr val="14213D"/>
+                </a:solidFill>
+                <a:latin typeface="Noto Sans JP"/>
+              </a:rPr>
+              <a:t>凪の画像</a:t>
+            </a:r>
+          </a:p>
+          <a:p>
+            <a:pPr algn="ctr"/>
+            <a:r>
+              <a:rPr sz="1100" b="0">
+                <a:solidFill>
+                  <a:srgbClr val="6B7280"/>
+                </a:solidFill>
+                <a:latin typeface="Noto Sans JP"/>
+              </a:rPr>
+              <a:t>ここに貼り付け</a:t>
+            </a:r>
+          </a:p>
+        </p:txBody>
+      </p:sp>
+      <p:sp>
+        <p:nvSpPr>
+          <p:cNvPr id="21" name="TextBox 20"/>
+          <p:cNvSpPr txBox="1"/>
+          <p:nvPr/>
+        </p:nvSpPr>
+        <p:spPr>
+          <a:xfrm>
+            <a:off x="6318504" y="3611880"/>
+            <a:ext cx="2340864" cy="457200"/>
+          </a:xfrm>
+          <a:prstGeom prst="rect">
+            <a:avLst/>
+          </a:prstGeom>
+          <a:noFill/>
+        </p:spPr>
+        <p:txBody>
+          <a:bodyPr wrap="square" anchor="t" lIns="45720" rIns="45720">
+            <a:spAutoFit/>
+          </a:bodyPr>
+          <a:lstStyle/>
+          <a:p>
+            <a:pPr algn="ctr"/>
+            <a:r>
+              <a:rPr sz="1800" b="1">
+                <a:solidFill>
+                  <a:srgbClr val="14213D"/>
+                </a:solidFill>
+                <a:latin typeface="Noto Sans JP"/>
+              </a:rPr>
+              <a:t>🔎 凪（なぎ）</a:t>
+            </a:r>
+          </a:p>
+        </p:txBody>
+      </p:sp>
+      <p:sp>
+        <p:nvSpPr>
+          <p:cNvPr id="22" name="TextBox 21"/>
+          <p:cNvSpPr txBox="1"/>
+          <p:nvPr/>
+        </p:nvSpPr>
+        <p:spPr>
+          <a:xfrm>
+            <a:off x="6318504" y="4069080"/>
+            <a:ext cx="2340864" cy="411480"/>
+          </a:xfrm>
+          <a:prstGeom prst="rect">
+            <a:avLst/>
+          </a:prstGeom>
+          <a:noFill/>
+        </p:spPr>
+        <p:txBody>
+          <a:bodyPr wrap="square" anchor="t" lIns="45720" rIns="45720">
+            <a:spAutoFit/>
+          </a:bodyPr>
+          <a:lstStyle/>
+          <a:p>
+            <a:pPr algn="ctr"/>
+            <a:r>
+              <a:rPr sz="1400" b="1">
+                <a:solidFill>
+                  <a:srgbClr val="14213D"/>
+                </a:solidFill>
+                <a:latin typeface="Noto Sans JP"/>
+              </a:rPr>
+              <a:t>企業リサーチ担当</a:t>
+            </a:r>
+          </a:p>
+        </p:txBody>
+      </p:sp>
+      <p:sp>
+        <p:nvSpPr>
+          <p:cNvPr id="23" name="TextBox 22"/>
+          <p:cNvSpPr txBox="1"/>
+          <p:nvPr/>
+        </p:nvSpPr>
+        <p:spPr>
+          <a:xfrm>
+            <a:off x="6318504" y="4526280"/>
+            <a:ext cx="2340864" cy="1097280"/>
+          </a:xfrm>
+          <a:prstGeom prst="rect">
+            <a:avLst/>
+          </a:prstGeom>
+          <a:noFill/>
+        </p:spPr>
+        <p:txBody>
+          <a:bodyPr wrap="square" anchor="t" lIns="45720" rIns="45720">
+            <a:spAutoFit/>
+          </a:bodyPr>
+          <a:lstStyle/>
+          <a:p>
+            <a:pPr algn="ctr"/>
+            <a:r>
+              <a:rPr sz="1400" b="0">
+                <a:solidFill>
+                  <a:srgbClr val="1F2937"/>
+                </a:solidFill>
+                <a:latin typeface="Noto Sans JP"/>
+              </a:rPr>
+              <a:t>どんな会社か・売上や利益の推移</a:t>
+            </a:r>
+          </a:p>
+        </p:txBody>
+      </p:sp>
+      <p:sp>
+        <p:nvSpPr>
+          <p:cNvPr id="24" name="Rounded Rectangle 23"/>
+          <p:cNvSpPr/>
+          <p:nvPr/>
+        </p:nvSpPr>
+        <p:spPr>
+          <a:xfrm>
+            <a:off x="8997696" y="1371600"/>
+            <a:ext cx="2615184" cy="4434840"/>
+          </a:xfrm>
+          <a:prstGeom prst="roundRect">
+            <a:avLst>
+              <a:gd name="adj" fmla="val 5000"/>
+            </a:avLst>
+          </a:prstGeom>
+          <a:solidFill>
+            <a:srgbClr val="F3F4F6"/>
+          </a:solidFill>
+          <a:ln>
+            <a:noFill/>
+          </a:ln>
+          <a:effectLst/>
+        </p:spPr>
+        <p:style>
+          <a:lnRef idx="1">
+            <a:schemeClr val="accent1"/>
+          </a:lnRef>
+          <a:fillRef idx="3">
+            <a:schemeClr val="accent1"/>
+          </a:fillRef>
+          <a:effectRef idx="2">
+            <a:schemeClr val="accent1"/>
+          </a:effectRef>
+          <a:fontRef idx="minor">
+            <a:schemeClr val="lt1"/>
+          </a:fontRef>
+        </p:style>
+        <p:txBody>
+          <a:bodyPr rtlCol="0" anchor="ctr"/>
+          <a:lstStyle/>
+          <a:p>
+            <a:pPr algn="ctr"/>
+          </a:p>
+        </p:txBody>
+      </p:sp>
+      <p:sp>
+        <p:nvSpPr>
+          <p:cNvPr id="25" name="Rectangle 24"/>
+          <p:cNvSpPr/>
+          <p:nvPr/>
+        </p:nvSpPr>
+        <p:spPr>
+          <a:xfrm>
+            <a:off x="8997696" y="1371600"/>
+            <a:ext cx="2615184" cy="91440"/>
+          </a:xfrm>
+          <a:prstGeom prst="rect">
+            <a:avLst/>
+          </a:prstGeom>
+          <a:solidFill>
+            <a:srgbClr val="D97706"/>
+          </a:solidFill>
+          <a:ln>
+            <a:noFill/>
+          </a:ln>
+          <a:effectLst/>
+        </p:spPr>
+        <p:style>
+          <a:lnRef idx="1">
+            <a:schemeClr val="accent1"/>
+          </a:lnRef>
+          <a:fillRef idx="3">
+            <a:schemeClr val="accent1"/>
+          </a:fillRef>
+          <a:effectRef idx="2">
+            <a:schemeClr val="accent1"/>
+          </a:effectRef>
+          <a:fontRef idx="minor">
+            <a:schemeClr val="lt1"/>
+          </a:fontRef>
+        </p:style>
+        <p:txBody>
+          <a:bodyPr rtlCol="0" anchor="ctr"/>
+          <a:lstStyle/>
+          <a:p>
+            <a:pPr algn="ctr"/>
+          </a:p>
+        </p:txBody>
+      </p:sp>
+      <p:sp>
+        <p:nvSpPr>
+          <p:cNvPr id="26" name="Rounded Rectangle 25"/>
+          <p:cNvSpPr/>
+          <p:nvPr/>
+        </p:nvSpPr>
+        <p:spPr>
+          <a:xfrm>
+            <a:off x="9390888" y="1645920"/>
+            <a:ext cx="1828800" cy="1828800"/>
+          </a:xfrm>
+          <a:prstGeom prst="roundRect">
+            <a:avLst/>
+          </a:prstGeom>
+          <a:solidFill>
+            <a:srgbClr val="FFFFFF"/>
+          </a:solidFill>
+          <a:ln>
+            <a:solidFill>
+              <a:srgbClr val="D97706"/>
+            </a:solidFill>
+            <a:prstDash val="dash"/>
+          </a:ln>
+          <a:effectLst/>
+        </p:spPr>
+        <p:style>
+          <a:lnRef idx="1">
+            <a:schemeClr val="accent1"/>
+          </a:lnRef>
+          <a:fillRef idx="3">
+            <a:schemeClr val="accent1"/>
+          </a:fillRef>
+          <a:effectRef idx="2">
+            <a:schemeClr val="accent1"/>
+          </a:effectRef>
+          <a:fontRef idx="minor">
+            <a:schemeClr val="lt1"/>
+          </a:fontRef>
+        </p:style>
+        <p:txBody>
+          <a:bodyPr rtlCol="0" anchor="ctr" wrap="square"/>
+          <a:lstStyle/>
+          <a:p>
+            <a:pPr algn="ctr"/>
+            <a:r>
+              <a:rPr sz="1500" b="1">
+                <a:solidFill>
+                  <a:srgbClr val="D97706"/>
+                </a:solidFill>
+                <a:latin typeface="Noto Sans JP"/>
+              </a:rPr>
+              <a:t>朔の画像</a:t>
+            </a:r>
+          </a:p>
+          <a:p>
+            <a:pPr algn="ctr"/>
+            <a:r>
+              <a:rPr sz="1100" b="0">
+                <a:solidFill>
+                  <a:srgbClr val="6B7280"/>
+                </a:solidFill>
+                <a:latin typeface="Noto Sans JP"/>
+              </a:rPr>
+              <a:t>ここに貼り付け</a:t>
+            </a:r>
+          </a:p>
+        </p:txBody>
+      </p:sp>
+      <p:sp>
+        <p:nvSpPr>
+          <p:cNvPr id="27" name="TextBox 26"/>
+          <p:cNvSpPr txBox="1"/>
+          <p:nvPr/>
+        </p:nvSpPr>
+        <p:spPr>
+          <a:xfrm>
+            <a:off x="9134856" y="3611880"/>
+            <a:ext cx="2340864" cy="457200"/>
+          </a:xfrm>
+          <a:prstGeom prst="rect">
+            <a:avLst/>
+          </a:prstGeom>
+          <a:noFill/>
+        </p:spPr>
+        <p:txBody>
+          <a:bodyPr wrap="square" anchor="t" lIns="45720" rIns="45720">
+            <a:spAutoFit/>
+          </a:bodyPr>
+          <a:lstStyle/>
+          <a:p>
+            <a:pPr algn="ctr"/>
+            <a:r>
+              <a:rPr sz="1800" b="1">
+                <a:solidFill>
+                  <a:srgbClr val="14213D"/>
+                </a:solidFill>
+                <a:latin typeface="Noto Sans JP"/>
+              </a:rPr>
+              <a:t>🛡 朔（さく）</a:t>
+            </a:r>
+          </a:p>
+        </p:txBody>
+      </p:sp>
+      <p:sp>
+        <p:nvSpPr>
+          <p:cNvPr id="28" name="TextBox 27"/>
+          <p:cNvSpPr txBox="1"/>
+          <p:nvPr/>
+        </p:nvSpPr>
+        <p:spPr>
+          <a:xfrm>
+            <a:off x="9134856" y="4069080"/>
+            <a:ext cx="2340864" cy="411480"/>
+          </a:xfrm>
+          <a:prstGeom prst="rect">
+            <a:avLst/>
+          </a:prstGeom>
+          <a:noFill/>
+        </p:spPr>
+        <p:txBody>
+          <a:bodyPr wrap="square" anchor="t" lIns="45720" rIns="45720">
+            <a:spAutoFit/>
+          </a:bodyPr>
+          <a:lstStyle/>
+          <a:p>
+            <a:pPr algn="ctr"/>
+            <a:r>
+              <a:rPr sz="1400" b="1">
+                <a:solidFill>
+                  <a:srgbClr val="D97706"/>
+                </a:solidFill>
+                <a:latin typeface="Noto Sans JP"/>
+              </a:rPr>
+              <a:t>まとめ・チェック担当</a:t>
+            </a:r>
+          </a:p>
+        </p:txBody>
+      </p:sp>
+      <p:sp>
+        <p:nvSpPr>
+          <p:cNvPr id="29" name="TextBox 28"/>
+          <p:cNvSpPr txBox="1"/>
+          <p:nvPr/>
+        </p:nvSpPr>
+        <p:spPr>
+          <a:xfrm>
+            <a:off x="9134856" y="4526280"/>
+            <a:ext cx="2340864" cy="1097280"/>
+          </a:xfrm>
+          <a:prstGeom prst="rect">
+            <a:avLst/>
+          </a:prstGeom>
+          <a:noFill/>
+        </p:spPr>
+        <p:txBody>
+          <a:bodyPr wrap="square" anchor="t" lIns="45720" rIns="45720">
+            <a:spAutoFit/>
+          </a:bodyPr>
+          <a:lstStyle/>
+          <a:p>
+            <a:pPr algn="ctr"/>
+            <a:r>
+              <a:rPr sz="1400" b="0">
+                <a:solidFill>
+                  <a:srgbClr val="1F2937"/>
+                </a:solidFill>
+                <a:latin typeface="Noto Sans JP"/>
+              </a:rPr>
+              <a:t>全体のまとめと注意点（最後に投稿）</a:t>
+            </a:r>
+          </a:p>
+        </p:txBody>
+      </p:sp>
+      <p:sp>
+        <p:nvSpPr>
+          <p:cNvPr id="30" name="TextBox 29"/>
           <p:cNvSpPr txBox="1"/>
           <p:nvPr/>
         </p:nvSpPr>

--- a/docs/camp_briefing/camp_briefing.pptx
+++ b/docs/camp_briefing/camp_briefing.pptx
@@ -540,7 +540,7 @@
           <a:p/>
           <a:p>
             <a:r>
-              <a:t>9月からDiscordの【速報】や【今朝のシグナル】で、Botが毎日いろいろな情報を流しています。「たくさん流れてくるけど、どこを見ればいいの？」「AIのキャラクターたちは何を言っているの？」という声をいただいたので、今日は30分で、その見方と付き合い方をお話しします。</a:t>
+              <a:t>9月からDiscordの【速報】や【今朝のシグナル】で、Botが毎日いろいろな情報を流しています。「たくさん流れてくるけど、どこを見ればいいの？」「AIのキャラクターたちは何を言っているの？」という声をいただいたので、今日は、その見方と付き合い方をお話しします。</a:t>
             </a:r>
           </a:p>
           <a:p/>
@@ -961,13 +961,25 @@
           <a:p/>
           <a:p>
             <a:r>
-              <a:t>マークは2つだけ。🎯が注目、点数が75点以上。👀が参考、注目度がやや低めのものです。</a:t>
+              <a:t>マークは3つです。🎯が注目。点数が75点以上で、しかも同じ業種の中で株価に勢いがある銘柄です。⏸は勢い待ち。点数は75点以上ですが、同じ業種の他の会社と比べて、最近の株価の勢いが弱いものです。👀は参考、注目度がやや低めのものです。</a:t>
             </a:r>
           </a:p>
           <a:p/>
           <a:p>
             <a:r>
-              <a:t>1枚のカードに5つの項目があります。今日の1番、コスモ・バイオで見てみます。</a:t>
+              <a:t>この⏸は、9月30日から加えた表示です。Botの仮想運用は、もともと「75点以上で、勢いもある」銘柄だけを買う決まりで動いていました。一覧の表示を、その決まりに揃えました。</a:t>
+            </a:r>
+          </a:p>
+          <a:p/>
+          <a:p>
+            <a:r>
+              <a:t>9月29日の1番、コスモ・バイオを見てください。77.5点と点数は一番高いのですが、同じ業種の中では勢いが弱いので⏸です。点数が一番高い銘柄が、すぐに注目になるわけではない、という良い例です。</a:t>
+            </a:r>
+          </a:p>
+          <a:p/>
+          <a:p>
+            <a:r>
+              <a:t>1枚のカードに5つの項目があります。このコスモ・バイオで見てみます。</a:t>
             </a:r>
           </a:p>
           <a:p>
@@ -1267,7 +1279,7 @@
           <a:lstStyle/>
           <a:p>
             <a:r>
-              <a:t>今朝の実際のコメントです。</a:t>
+              <a:t>9月29日の実際のコメントです。</a:t>
             </a:r>
           </a:p>
           <a:p/>
@@ -1297,9 +1309,26 @@
               <a:t>ここが面白いところで、同じ候補一覧に載っていても、4人の見方はそれぞれ違います。良い点と気になる点の両方が出てくる。</a:t>
             </a:r>
           </a:p>
-          <a:p>
-            <a:r>
-              <a:t>特に「割安なのに業績が落ちている」銘柄は、安いなりの理由があるかもしれません。こういう多面的な見方そのものが、投資の勉強になると思っています。</a:t>
+          <a:p/>
+          <a:p>
+            <a:r>
+              <a:t>ただ、東武住販のコメントには補足があります。「前年を下回った」というのは、直近の決算、第3四半期までの9か月分を、前年の同じ時期と比べた数字です。売上はマイナス7%でした。</a:t>
+            </a:r>
+          </a:p>
+          <a:p>
+            <a:r>
+              <a:t>一方で、1年を通した1株あたりの利益は、78円、127円、146円と、3期続けて増えています。</a:t>
+            </a:r>
+          </a:p>
+          <a:p>
+            <a:r>
+              <a:t>どちらも正しい数字で、見ている期間が違うだけです。9月30日からは、AIチームが業績に触れるときに、どの期間の数字かを必ず書くようにしました。</a:t>
+            </a:r>
+          </a:p>
+          <a:p/>
+          <a:p>
+            <a:r>
+              <a:t>数字を見るときは、「いつの、何と比べた数字か」を確かめる。これも大事な読み方です。</a:t>
             </a:r>
           </a:p>
         </p:txBody>
@@ -1740,7 +1769,7 @@
           </a:p>
           <a:p>
             <a:r>
-              <a:t>その上位7銘柄が候補一覧です。</a:t>
+              <a:t>その上位7銘柄が候補一覧です。75点以上で勢いもあるものが🎯、75点以上でも勢いが足りないものは⏸、勢い待ちになります。</a:t>
             </a:r>
           </a:p>
           <a:p/>
@@ -2832,7 +2861,7 @@
           <a:p/>
           <a:p>
             <a:r>
-              <a:t>「🎯なのに、AIチームが慎重にと言っているのはなぜ？」🎯は点数による機械的な判定で、AIチームは業績や値動きなど別の角度から見ているからです。意見が分かれる銘柄こそ、良い教材です。</a:t>
+              <a:t>「🎯なのに、AIチームが慎重にと言っているのはなぜ？」🎯は点数と株価の勢いによる機械的な判定で、AIチームは業績など別の角度から見ているからです。意見が分かれる銘柄こそ、良い教材です。</a:t>
             </a:r>
           </a:p>
           <a:p/>
@@ -9382,7 +9411,7 @@
                 </a:solidFill>
                 <a:latin typeface="Noto Sans JP"/>
               </a:rPr>
-              <a:t>🎯 注目（複合スコア75点以上）　👀 参考（注目度やや低め）</a:t>
+              <a:t>🎯 注目（75点以上＋同じ業種の中で株価の勢いあり）</a:t>
             </a:r>
           </a:p>
           <a:p>
@@ -9398,7 +9427,7 @@
                 </a:solidFill>
                 <a:latin typeface="Noto Sans JP"/>
               </a:rPr>
-              <a:t>💡 割安度＝同じ業種の他社と比べた株価の安さ</a:t>
+              <a:t>⏸ 勢い待ち（75点以上だが勢いが弱め）　👀 参考（注目度やや低め）</a:t>
             </a:r>
           </a:p>
           <a:p>
@@ -9414,7 +9443,23 @@
                 </a:solidFill>
                 <a:latin typeface="Noto Sans JP"/>
               </a:rPr>
-              <a:t>　 損切り目安＝ここまで下がったら撤退を考える目安（毎日見直し）</a:t>
+              <a:t> </a:t>
+            </a:r>
+          </a:p>
+          <a:p>
+            <a:pPr algn="l">
+              <a:spcBef>
+                <a:spcPts val="1200"/>
+              </a:spcBef>
+            </a:pPr>
+            <a:r>
+              <a:rPr sz="1700" b="1">
+                <a:solidFill>
+                  <a:srgbClr val="FFFFFF"/>
+                </a:solidFill>
+                <a:latin typeface="Noto Sans JP"/>
+              </a:rPr>
+              <a:t>⏸ 1. コスモ・バイオ（3386）</a:t>
             </a:r>
           </a:p>
           <a:p>
@@ -9430,6 +9475,54 @@
                 </a:solidFill>
                 <a:latin typeface="Noto Sans JP"/>
               </a:rPr>
+              <a:t>現在値　1,260円　　割安度　△ふつう</a:t>
+            </a:r>
+          </a:p>
+          <a:p>
+            <a:pPr algn="l">
+              <a:spcBef>
+                <a:spcPts val="600"/>
+              </a:spcBef>
+            </a:pPr>
+            <a:r>
+              <a:rPr sz="1500" b="0">
+                <a:solidFill>
+                  <a:srgbClr val="DBDEE1"/>
+                </a:solidFill>
+                <a:latin typeface="Noto Sans JP"/>
+              </a:rPr>
+              <a:t>損切り目安　1,222円</a:t>
+            </a:r>
+          </a:p>
+          <a:p>
+            <a:pPr algn="l">
+              <a:spcBef>
+                <a:spcPts val="600"/>
+              </a:spcBef>
+            </a:pPr>
+            <a:r>
+              <a:rPr sz="1500" b="0">
+                <a:solidFill>
+                  <a:srgbClr val="DBDEE1"/>
+                </a:solidFill>
+                <a:latin typeface="Noto Sans JP"/>
+              </a:rPr>
+              <a:t>値動き　🟢 おだやか　　財務　🟢 安定</a:t>
+            </a:r>
+          </a:p>
+          <a:p>
+            <a:pPr algn="l">
+              <a:spcBef>
+                <a:spcPts val="600"/>
+              </a:spcBef>
+            </a:pPr>
+            <a:r>
+              <a:rPr sz="1500" b="0">
+                <a:solidFill>
+                  <a:srgbClr val="DBDEE1"/>
+                </a:solidFill>
+                <a:latin typeface="Noto Sans JP"/>
+              </a:rPr>
               <a:t> </a:t>
             </a:r>
           </a:p>
@@ -9446,7 +9539,7 @@
                 </a:solidFill>
                 <a:latin typeface="Noto Sans JP"/>
               </a:rPr>
-              <a:t>🎯 1. コスモ・バイオ（3386）</a:t>
+              <a:t>🎯 2. インテリックスHD（463A）</a:t>
             </a:r>
           </a:p>
           <a:p>
@@ -9462,71 +9555,7 @@
                 </a:solidFill>
                 <a:latin typeface="Noto Sans JP"/>
               </a:rPr>
-              <a:t>現在値　1,260円</a:t>
-            </a:r>
-          </a:p>
-          <a:p>
-            <a:pPr algn="l">
-              <a:spcBef>
-                <a:spcPts val="600"/>
-              </a:spcBef>
-            </a:pPr>
-            <a:r>
-              <a:rPr sz="1500" b="0">
-                <a:solidFill>
-                  <a:srgbClr val="DBDEE1"/>
-                </a:solidFill>
-                <a:latin typeface="Noto Sans JP"/>
-              </a:rPr>
-              <a:t>割安度　△ふつう</a:t>
-            </a:r>
-          </a:p>
-          <a:p>
-            <a:pPr algn="l">
-              <a:spcBef>
-                <a:spcPts val="600"/>
-              </a:spcBef>
-            </a:pPr>
-            <a:r>
-              <a:rPr sz="1500" b="0">
-                <a:solidFill>
-                  <a:srgbClr val="DBDEE1"/>
-                </a:solidFill>
-                <a:latin typeface="Noto Sans JP"/>
-              </a:rPr>
-              <a:t>損切り目安　1,222円</a:t>
-            </a:r>
-          </a:p>
-          <a:p>
-            <a:pPr algn="l">
-              <a:spcBef>
-                <a:spcPts val="600"/>
-              </a:spcBef>
-            </a:pPr>
-            <a:r>
-              <a:rPr sz="1500" b="0">
-                <a:solidFill>
-                  <a:srgbClr val="DBDEE1"/>
-                </a:solidFill>
-                <a:latin typeface="Noto Sans JP"/>
-              </a:rPr>
-              <a:t>値動き　🟢 おだやか</a:t>
-            </a:r>
-          </a:p>
-          <a:p>
-            <a:pPr algn="l">
-              <a:spcBef>
-                <a:spcPts val="600"/>
-              </a:spcBef>
-            </a:pPr>
-            <a:r>
-              <a:rPr sz="1500" b="0">
-                <a:solidFill>
-                  <a:srgbClr val="DBDEE1"/>
-                </a:solidFill>
-                <a:latin typeface="Noto Sans JP"/>
-              </a:rPr>
-              <a:t>財務　🟢 安定</a:t>
+              <a:t>現在値　1,028円　　割安度　◎とても割安</a:t>
             </a:r>
           </a:p>
         </p:txBody>
@@ -9600,7 +9629,23 @@
                 </a:solidFill>
                 <a:latin typeface="Noto Sans JP"/>
               </a:rPr>
-              <a:t>🎯 注目 … スコア75点以上</a:t>
+              <a:t>🎯 注目 … 75点以上＋勢いあり</a:t>
+            </a:r>
+          </a:p>
+          <a:p>
+            <a:pPr algn="l">
+              <a:spcBef>
+                <a:spcPts val="800"/>
+              </a:spcBef>
+            </a:pPr>
+            <a:r>
+              <a:rPr sz="1700" b="0">
+                <a:solidFill>
+                  <a:srgbClr val="1F2937"/>
+                </a:solidFill>
+                <a:latin typeface="Noto Sans JP"/>
+              </a:rPr>
+              <a:t>⏸ 勢い待ち … 75点以上・勢い弱め</a:t>
             </a:r>
           </a:p>
           <a:p>
@@ -12176,7 +12221,7 @@
                 </a:solidFill>
                 <a:latin typeface="Noto Sans JP"/>
               </a:rPr>
-              <a:t>「割安なのに業績が落ちている」</a:t>
+              <a:t>数字は「いつの期間か」を見る</a:t>
             </a:r>
           </a:p>
           <a:p>
@@ -12192,7 +12237,23 @@
                 </a:solidFill>
                 <a:latin typeface="Noto Sans JP"/>
               </a:rPr>
-              <a:t>＝ 安い理由があるかもしれない</a:t>
+              <a:t>東武住販：直近の四半期累計は減収</a:t>
+            </a:r>
+          </a:p>
+          <a:p>
+            <a:pPr algn="l">
+              <a:spcBef>
+                <a:spcPts val="800"/>
+              </a:spcBef>
+            </a:pPr>
+            <a:r>
+              <a:rPr sz="1700" b="0">
+                <a:solidFill>
+                  <a:srgbClr val="1F2937"/>
+                </a:solidFill>
+                <a:latin typeface="Noto Sans JP"/>
+              </a:rPr>
+              <a:t>　通期の1株利益は3期続けて増加</a:t>
             </a:r>
           </a:p>
           <a:p>
@@ -14226,7 +14287,7 @@
                           </a:solidFill>
                           <a:latin typeface="Noto Sans JP"/>
                         </a:rPr>
-                        <a:t>🎯 75点以上／👀 参考</a:t>
+                        <a:t>🎯 75点以上＋勢い／⏸ 勢い待ち／👀 参考</a:t>
                       </a:r>
                     </a:p>
                   </a:txBody>
@@ -19512,7 +19573,7 @@
                 </a:solidFill>
                 <a:latin typeface="Noto Sans JP"/>
               </a:rPr>
-              <a:t>　　🎯は点数による機械的な判定、AIは業績や値動きなど別の角度から見ているため</a:t>
+              <a:t>　　🎯は点数と株価の勢いによる機械的な判定、AIは業績など別の角度から見ているため</a:t>
             </a:r>
           </a:p>
           <a:p>
@@ -19823,6 +19884,41 @@
                 <a:latin typeface="Noto Sans JP"/>
               </a:rPr>
               <a:t>講師：kurosuke</a:t>
+            </a:r>
+          </a:p>
+        </p:txBody>
+      </p:sp>
+      <p:sp>
+        <p:nvSpPr>
+          <p:cNvPr id="8" name="TextBox 7"/>
+          <p:cNvSpPr txBox="1"/>
+          <p:nvPr/>
+        </p:nvSpPr>
+        <p:spPr>
+          <a:xfrm>
+            <a:off x="6309360" y="5760720"/>
+            <a:ext cx="5029200" cy="457200"/>
+          </a:xfrm>
+          <a:prstGeom prst="rect">
+            <a:avLst/>
+          </a:prstGeom>
+          <a:noFill/>
+        </p:spPr>
+        <p:txBody>
+          <a:bodyPr wrap="square" anchor="t" lIns="45720" rIns="45720">
+            <a:spAutoFit/>
+          </a:bodyPr>
+          <a:lstStyle/>
+          <a:p>
+            <a:pPr algn="r"/>
+            <a:r>
+              <a:rPr sz="1600" b="0">
+                <a:solidFill>
+                  <a:srgbClr val="9CA3AF"/>
+                </a:solidFill>
+                <a:latin typeface="Noto Sans JP"/>
+              </a:rPr>
+              <a:t>音声：VOICEVOX:WhiteCUL</a:t>
             </a:r>
           </a:p>
         </p:txBody>

--- a/docs/camp_briefing/camp_briefing.pptx
+++ b/docs/camp_briefing/camp_briefing.pptx
@@ -10676,74 +10676,30 @@
           </a:p>
         </p:txBody>
       </p:sp>
-      <p:sp>
-        <p:nvSpPr>
-          <p:cNvPr id="8" name="Rounded Rectangle 7"/>
-          <p:cNvSpPr/>
+      <p:pic>
+        <p:nvPicPr>
+          <p:cNvPr id="8" name="Picture 7" descr="hayate.png"/>
+          <p:cNvPicPr>
+            <a:picLocks noChangeAspect="1"/>
+          </p:cNvPicPr>
           <p:nvPr/>
-        </p:nvSpPr>
+        </p:nvPicPr>
+        <p:blipFill>
+          <a:blip r:embed="rId2"/>
+          <a:stretch>
+            <a:fillRect/>
+          </a:stretch>
+        </p:blipFill>
         <p:spPr>
           <a:xfrm>
             <a:off x="941832" y="1645920"/>
             <a:ext cx="1828800" cy="1828800"/>
           </a:xfrm>
-          <a:prstGeom prst="roundRect">
+          <a:prstGeom prst="rect">
             <a:avLst/>
           </a:prstGeom>
-          <a:solidFill>
-            <a:srgbClr val="FFFFFF"/>
-          </a:solidFill>
-          <a:ln>
-            <a:solidFill>
-              <a:srgbClr val="DC2626"/>
-            </a:solidFill>
-            <a:prstDash val="dash"/>
-          </a:ln>
-          <a:effectLst/>
-        </p:spPr>
-        <p:style>
-          <a:lnRef idx="1">
-            <a:schemeClr val="accent1"/>
-          </a:lnRef>
-          <a:fillRef idx="3">
-            <a:schemeClr val="accent1"/>
-          </a:fillRef>
-          <a:effectRef idx="2">
-            <a:schemeClr val="accent1"/>
-          </a:effectRef>
-          <a:fontRef idx="minor">
-            <a:schemeClr val="lt1"/>
-          </a:fontRef>
-        </p:style>
-        <p:txBody>
-          <a:bodyPr rtlCol="0" anchor="ctr" wrap="square"/>
-          <a:lstStyle/>
-          <a:p>
-            <a:pPr algn="ctr"/>
-            <a:r>
-              <a:rPr sz="1500" b="1">
-                <a:solidFill>
-                  <a:srgbClr val="DC2626"/>
-                </a:solidFill>
-                <a:latin typeface="Noto Sans JP"/>
-              </a:rPr>
-              <a:t>颯の画像</a:t>
-            </a:r>
-          </a:p>
-          <a:p>
-            <a:pPr algn="ctr"/>
-            <a:r>
-              <a:rPr sz="1100" b="0">
-                <a:solidFill>
-                  <a:srgbClr val="6B7280"/>
-                </a:solidFill>
-                <a:latin typeface="Noto Sans JP"/>
-              </a:rPr>
-              <a:t>ここに貼り付け</a:t>
-            </a:r>
-          </a:p>
-        </p:txBody>
-      </p:sp>
+        </p:spPr>
+      </p:pic>
       <p:sp>
         <p:nvSpPr>
           <p:cNvPr id="9" name="TextBox 8"/>
@@ -10844,7 +10800,19 @@
                 </a:solidFill>
                 <a:latin typeface="Noto Sans JP"/>
               </a:rPr>
-              <a:t>値動きの大きさ・急な変動への備え</a:t>
+              <a:t>値動きの大きさと</a:t>
+            </a:r>
+          </a:p>
+          <a:p>
+            <a:pPr algn="ctr"/>
+            <a:r>
+              <a:rPr sz="1400" b="0">
+                <a:solidFill>
+                  <a:srgbClr val="1F2937"/>
+                </a:solidFill>
+                <a:latin typeface="Noto Sans JP"/>
+              </a:rPr>
+              <a:t>急な変動への備え</a:t>
             </a:r>
           </a:p>
         </p:txBody>
@@ -10939,74 +10907,30 @@
           </a:p>
         </p:txBody>
       </p:sp>
-      <p:sp>
-        <p:nvSpPr>
-          <p:cNvPr id="14" name="Rounded Rectangle 13"/>
-          <p:cNvSpPr/>
+      <p:pic>
+        <p:nvPicPr>
+          <p:cNvPr id="14" name="Picture 13" descr="tamaki.png"/>
+          <p:cNvPicPr>
+            <a:picLocks noChangeAspect="1"/>
+          </p:cNvPicPr>
           <p:nvPr/>
-        </p:nvSpPr>
+        </p:nvPicPr>
+        <p:blipFill>
+          <a:blip r:embed="rId3"/>
+          <a:stretch>
+            <a:fillRect/>
+          </a:stretch>
+        </p:blipFill>
         <p:spPr>
           <a:xfrm>
             <a:off x="3758184" y="1645920"/>
             <a:ext cx="1828800" cy="1828800"/>
           </a:xfrm>
-          <a:prstGeom prst="roundRect">
+          <a:prstGeom prst="rect">
             <a:avLst/>
           </a:prstGeom>
-          <a:solidFill>
-            <a:srgbClr val="FFFFFF"/>
-          </a:solidFill>
-          <a:ln>
-            <a:solidFill>
-              <a:srgbClr val="2563EB"/>
-            </a:solidFill>
-            <a:prstDash val="dash"/>
-          </a:ln>
-          <a:effectLst/>
-        </p:spPr>
-        <p:style>
-          <a:lnRef idx="1">
-            <a:schemeClr val="accent1"/>
-          </a:lnRef>
-          <a:fillRef idx="3">
-            <a:schemeClr val="accent1"/>
-          </a:fillRef>
-          <a:effectRef idx="2">
-            <a:schemeClr val="accent1"/>
-          </a:effectRef>
-          <a:fontRef idx="minor">
-            <a:schemeClr val="lt1"/>
-          </a:fontRef>
-        </p:style>
-        <p:txBody>
-          <a:bodyPr rtlCol="0" anchor="ctr" wrap="square"/>
-          <a:lstStyle/>
-          <a:p>
-            <a:pPr algn="ctr"/>
-            <a:r>
-              <a:rPr sz="1500" b="1">
-                <a:solidFill>
-                  <a:srgbClr val="2563EB"/>
-                </a:solidFill>
-                <a:latin typeface="Noto Sans JP"/>
-              </a:rPr>
-              <a:t>環の画像</a:t>
-            </a:r>
-          </a:p>
-          <a:p>
-            <a:pPr algn="ctr"/>
-            <a:r>
-              <a:rPr sz="1100" b="0">
-                <a:solidFill>
-                  <a:srgbClr val="6B7280"/>
-                </a:solidFill>
-                <a:latin typeface="Noto Sans JP"/>
-              </a:rPr>
-              <a:t>ここに貼り付け</a:t>
-            </a:r>
-          </a:p>
-        </p:txBody>
-      </p:sp>
+        </p:spPr>
+      </p:pic>
       <p:sp>
         <p:nvSpPr>
           <p:cNvPr id="15" name="TextBox 14"/>
@@ -11107,7 +11031,19 @@
                 </a:solidFill>
                 <a:latin typeface="Noto Sans JP"/>
               </a:rPr>
-              <a:t>割安さと、利益が伸びているか</a:t>
+              <a:t>割安さと</a:t>
+            </a:r>
+          </a:p>
+          <a:p>
+            <a:pPr algn="ctr"/>
+            <a:r>
+              <a:rPr sz="1400" b="0">
+                <a:solidFill>
+                  <a:srgbClr val="1F2937"/>
+                </a:solidFill>
+                <a:latin typeface="Noto Sans JP"/>
+              </a:rPr>
+              <a:t>利益が伸びているか</a:t>
             </a:r>
           </a:p>
         </p:txBody>
@@ -11202,74 +11138,30 @@
           </a:p>
         </p:txBody>
       </p:sp>
-      <p:sp>
-        <p:nvSpPr>
-          <p:cNvPr id="20" name="Rounded Rectangle 19"/>
-          <p:cNvSpPr/>
+      <p:pic>
+        <p:nvPicPr>
+          <p:cNvPr id="20" name="Picture 19" descr="nagi.png"/>
+          <p:cNvPicPr>
+            <a:picLocks noChangeAspect="1"/>
+          </p:cNvPicPr>
           <p:nvPr/>
-        </p:nvSpPr>
+        </p:nvPicPr>
+        <p:blipFill>
+          <a:blip r:embed="rId4"/>
+          <a:stretch>
+            <a:fillRect/>
+          </a:stretch>
+        </p:blipFill>
         <p:spPr>
           <a:xfrm>
             <a:off x="6574536" y="1645920"/>
             <a:ext cx="1828800" cy="1828800"/>
           </a:xfrm>
-          <a:prstGeom prst="roundRect">
+          <a:prstGeom prst="rect">
             <a:avLst/>
           </a:prstGeom>
-          <a:solidFill>
-            <a:srgbClr val="FFFFFF"/>
-          </a:solidFill>
-          <a:ln>
-            <a:solidFill>
-              <a:srgbClr val="14213D"/>
-            </a:solidFill>
-            <a:prstDash val="dash"/>
-          </a:ln>
-          <a:effectLst/>
-        </p:spPr>
-        <p:style>
-          <a:lnRef idx="1">
-            <a:schemeClr val="accent1"/>
-          </a:lnRef>
-          <a:fillRef idx="3">
-            <a:schemeClr val="accent1"/>
-          </a:fillRef>
-          <a:effectRef idx="2">
-            <a:schemeClr val="accent1"/>
-          </a:effectRef>
-          <a:fontRef idx="minor">
-            <a:schemeClr val="lt1"/>
-          </a:fontRef>
-        </p:style>
-        <p:txBody>
-          <a:bodyPr rtlCol="0" anchor="ctr" wrap="square"/>
-          <a:lstStyle/>
-          <a:p>
-            <a:pPr algn="ctr"/>
-            <a:r>
-              <a:rPr sz="1500" b="1">
-                <a:solidFill>
-                  <a:srgbClr val="14213D"/>
-                </a:solidFill>
-                <a:latin typeface="Noto Sans JP"/>
-              </a:rPr>
-              <a:t>凪の画像</a:t>
-            </a:r>
-          </a:p>
-          <a:p>
-            <a:pPr algn="ctr"/>
-            <a:r>
-              <a:rPr sz="1100" b="0">
-                <a:solidFill>
-                  <a:srgbClr val="6B7280"/>
-                </a:solidFill>
-                <a:latin typeface="Noto Sans JP"/>
-              </a:rPr>
-              <a:t>ここに貼り付け</a:t>
-            </a:r>
-          </a:p>
-        </p:txBody>
-      </p:sp>
+        </p:spPr>
+      </p:pic>
       <p:sp>
         <p:nvSpPr>
           <p:cNvPr id="21" name="TextBox 20"/>
@@ -11370,7 +11262,19 @@
                 </a:solidFill>
                 <a:latin typeface="Noto Sans JP"/>
               </a:rPr>
-              <a:t>どんな会社か・売上や利益の推移</a:t>
+              <a:t>どんな会社か</a:t>
+            </a:r>
+          </a:p>
+          <a:p>
+            <a:pPr algn="ctr"/>
+            <a:r>
+              <a:rPr sz="1400" b="0">
+                <a:solidFill>
+                  <a:srgbClr val="1F2937"/>
+                </a:solidFill>
+                <a:latin typeface="Noto Sans JP"/>
+              </a:rPr>
+              <a:t>売上や利益の推移</a:t>
             </a:r>
           </a:p>
         </p:txBody>
@@ -11465,74 +11369,30 @@
           </a:p>
         </p:txBody>
       </p:sp>
-      <p:sp>
-        <p:nvSpPr>
-          <p:cNvPr id="26" name="Rounded Rectangle 25"/>
-          <p:cNvSpPr/>
+      <p:pic>
+        <p:nvPicPr>
+          <p:cNvPr id="26" name="Picture 25" descr="saku.png"/>
+          <p:cNvPicPr>
+            <a:picLocks noChangeAspect="1"/>
+          </p:cNvPicPr>
           <p:nvPr/>
-        </p:nvSpPr>
+        </p:nvPicPr>
+        <p:blipFill>
+          <a:blip r:embed="rId5"/>
+          <a:stretch>
+            <a:fillRect/>
+          </a:stretch>
+        </p:blipFill>
         <p:spPr>
           <a:xfrm>
             <a:off x="9390888" y="1645920"/>
             <a:ext cx="1828800" cy="1828800"/>
           </a:xfrm>
-          <a:prstGeom prst="roundRect">
+          <a:prstGeom prst="rect">
             <a:avLst/>
           </a:prstGeom>
-          <a:solidFill>
-            <a:srgbClr val="FFFFFF"/>
-          </a:solidFill>
-          <a:ln>
-            <a:solidFill>
-              <a:srgbClr val="D97706"/>
-            </a:solidFill>
-            <a:prstDash val="dash"/>
-          </a:ln>
-          <a:effectLst/>
-        </p:spPr>
-        <p:style>
-          <a:lnRef idx="1">
-            <a:schemeClr val="accent1"/>
-          </a:lnRef>
-          <a:fillRef idx="3">
-            <a:schemeClr val="accent1"/>
-          </a:fillRef>
-          <a:effectRef idx="2">
-            <a:schemeClr val="accent1"/>
-          </a:effectRef>
-          <a:fontRef idx="minor">
-            <a:schemeClr val="lt1"/>
-          </a:fontRef>
-        </p:style>
-        <p:txBody>
-          <a:bodyPr rtlCol="0" anchor="ctr" wrap="square"/>
-          <a:lstStyle/>
-          <a:p>
-            <a:pPr algn="ctr"/>
-            <a:r>
-              <a:rPr sz="1500" b="1">
-                <a:solidFill>
-                  <a:srgbClr val="D97706"/>
-                </a:solidFill>
-                <a:latin typeface="Noto Sans JP"/>
-              </a:rPr>
-              <a:t>朔の画像</a:t>
-            </a:r>
-          </a:p>
-          <a:p>
-            <a:pPr algn="ctr"/>
-            <a:r>
-              <a:rPr sz="1100" b="0">
-                <a:solidFill>
-                  <a:srgbClr val="6B7280"/>
-                </a:solidFill>
-                <a:latin typeface="Noto Sans JP"/>
-              </a:rPr>
-              <a:t>ここに貼り付け</a:t>
-            </a:r>
-          </a:p>
-        </p:txBody>
-      </p:sp>
+        </p:spPr>
+      </p:pic>
       <p:sp>
         <p:nvSpPr>
           <p:cNvPr id="27" name="TextBox 26"/>
@@ -11633,7 +11493,19 @@
                 </a:solidFill>
                 <a:latin typeface="Noto Sans JP"/>
               </a:rPr>
-              <a:t>全体のまとめと注意点（最後に投稿）</a:t>
+              <a:t>全体のまとめと注意点</a:t>
+            </a:r>
+          </a:p>
+          <a:p>
+            <a:pPr algn="ctr"/>
+            <a:r>
+              <a:rPr sz="1400" b="0">
+                <a:solidFill>
+                  <a:srgbClr val="1F2937"/>
+                </a:solidFill>
+                <a:latin typeface="Noto Sans JP"/>
+              </a:rPr>
+              <a:t>（最後に投稿）</a:t>
             </a:r>
           </a:p>
         </p:txBody>
